--- a/Forest Ridge Ward Announcements Editor.pptx
+++ b/Forest Ridge Ward Announcements Editor.pptx
@@ -5,17 +5,16 @@
     <p:sldMasterId id="2147483648" r:id="rId1"/>
   </p:sldMasterIdLst>
   <p:notesMasterIdLst>
-    <p:notesMasterId r:id="rId10"/>
+    <p:notesMasterId r:id="rId9"/>
   </p:notesMasterIdLst>
   <p:sldIdLst>
     <p:sldId id="256" r:id="rId2"/>
-    <p:sldId id="260" r:id="rId3"/>
-    <p:sldId id="264" r:id="rId4"/>
-    <p:sldId id="258" r:id="rId5"/>
-    <p:sldId id="257" r:id="rId6"/>
-    <p:sldId id="261" r:id="rId7"/>
-    <p:sldId id="262" r:id="rId8"/>
-    <p:sldId id="263" r:id="rId9"/>
+    <p:sldId id="258" r:id="rId3"/>
+    <p:sldId id="261" r:id="rId4"/>
+    <p:sldId id="257" r:id="rId5"/>
+    <p:sldId id="264" r:id="rId6"/>
+    <p:sldId id="262" r:id="rId7"/>
+    <p:sldId id="263" r:id="rId8"/>
   </p:sldIdLst>
   <p:sldSz cx="12192000" cy="6858000"/>
   <p:notesSz cx="6858000" cy="12192000"/>
@@ -124,12 +123,12 @@
   <pc:docChgLst>
     <pc:chgData name="Kyle Emler" userId="d7ad607c459f9042" providerId="LiveId" clId="{EB07A9B2-3D2E-4B01-87CD-3E1B255B7E55}"/>
     <pc:docChg chg="custSel addSld delSld modSld sldOrd">
-      <pc:chgData name="Kyle Emler" userId="d7ad607c459f9042" providerId="LiveId" clId="{EB07A9B2-3D2E-4B01-87CD-3E1B255B7E55}" dt="2026-09-20T02:40:28.647" v="2" actId="47"/>
+      <pc:chgData name="Kyle Emler" userId="d7ad607c459f9042" providerId="LiveId" clId="{EB07A9B2-3D2E-4B01-87CD-3E1B255B7E55}" dt="2026-09-27T05:35:41.778" v="9" actId="47"/>
       <pc:docMkLst>
         <pc:docMk/>
       </pc:docMkLst>
       <pc:sldChg chg="delSp modSp mod ord">
-        <pc:chgData name="Kyle Emler" userId="d7ad607c459f9042" providerId="LiveId" clId="{EB07A9B2-3D2E-4B01-87CD-3E1B255B7E55}" dt="2026-09-20T02:40:07.391" v="1" actId="26606"/>
+        <pc:chgData name="Kyle Emler" userId="d7ad607c459f9042" providerId="LiveId" clId="{EB07A9B2-3D2E-4B01-87CD-3E1B255B7E55}" dt="2026-09-27T05:33:22.929" v="8" actId="26606"/>
         <pc:sldMkLst>
           <pc:docMk/>
           <pc:sldMk cId="0" sldId="257"/>
@@ -140,38 +139,6 @@
             <pc:docMk/>
             <pc:sldMk cId="0" sldId="257"/>
             <ac:spMk id="7" creationId="{00000000-0000-0000-0000-000000000000}"/>
-          </ac:spMkLst>
-        </pc:spChg>
-        <pc:spChg chg="del">
-          <ac:chgData name="Kyle Emler" userId="d7ad607c459f9042" providerId="LiveId" clId="{EB07A9B2-3D2E-4B01-87CD-3E1B255B7E55}" dt="2026-09-20T02:38:35.617" v="0" actId="26606"/>
-          <ac:spMkLst>
-            <pc:docMk/>
-            <pc:sldMk cId="0" sldId="257"/>
-            <ac:spMk id="9" creationId="{00000000-0000-0000-0000-000000000000}"/>
-          </ac:spMkLst>
-        </pc:spChg>
-        <pc:spChg chg="del">
-          <ac:chgData name="Kyle Emler" userId="d7ad607c459f9042" providerId="LiveId" clId="{EB07A9B2-3D2E-4B01-87CD-3E1B255B7E55}" dt="2026-09-20T02:38:35.617" v="0" actId="26606"/>
-          <ac:spMkLst>
-            <pc:docMk/>
-            <pc:sldMk cId="0" sldId="257"/>
-            <ac:spMk id="10" creationId="{00000000-0000-0000-0000-000000000000}"/>
-          </ac:spMkLst>
-        </pc:spChg>
-        <pc:spChg chg="del">
-          <ac:chgData name="Kyle Emler" userId="d7ad607c459f9042" providerId="LiveId" clId="{EB07A9B2-3D2E-4B01-87CD-3E1B255B7E55}" dt="2026-09-20T02:38:35.617" v="0" actId="26606"/>
-          <ac:spMkLst>
-            <pc:docMk/>
-            <pc:sldMk cId="0" sldId="257"/>
-            <ac:spMk id="11" creationId="{00000000-0000-0000-0000-000000000000}"/>
-          </ac:spMkLst>
-        </pc:spChg>
-        <pc:spChg chg="del">
-          <ac:chgData name="Kyle Emler" userId="d7ad607c459f9042" providerId="LiveId" clId="{EB07A9B2-3D2E-4B01-87CD-3E1B255B7E55}" dt="2026-09-20T02:38:35.617" v="0" actId="26606"/>
-          <ac:spMkLst>
-            <pc:docMk/>
-            <pc:sldMk cId="0" sldId="257"/>
-            <ac:spMk id="12" creationId="{00000000-0000-0000-0000-000000000000}"/>
           </ac:spMkLst>
         </pc:spChg>
         <pc:spChg chg="mod">
@@ -191,7 +158,7 @@
           </ac:spMkLst>
         </pc:spChg>
         <pc:spChg chg="mod">
-          <ac:chgData name="Kyle Emler" userId="d7ad607c459f9042" providerId="LiveId" clId="{EB07A9B2-3D2E-4B01-87CD-3E1B255B7E55}" dt="2026-09-20T02:40:07.391" v="1" actId="26606"/>
+          <ac:chgData name="Kyle Emler" userId="d7ad607c459f9042" providerId="LiveId" clId="{EB07A9B2-3D2E-4B01-87CD-3E1B255B7E55}" dt="2026-09-27T05:33:22.929" v="8" actId="26606"/>
           <ac:spMkLst>
             <pc:docMk/>
             <pc:sldMk cId="0" sldId="257"/>
@@ -208,13 +175,13 @@
         </pc:spChg>
       </pc:sldChg>
       <pc:sldChg chg="modSp mod ord">
-        <pc:chgData name="Kyle Emler" userId="d7ad607c459f9042" providerId="LiveId" clId="{EB07A9B2-3D2E-4B01-87CD-3E1B255B7E55}" dt="2026-09-20T02:40:07.391" v="1" actId="26606"/>
+        <pc:chgData name="Kyle Emler" userId="d7ad607c459f9042" providerId="LiveId" clId="{EB07A9B2-3D2E-4B01-87CD-3E1B255B7E55}" dt="2026-09-27T05:33:22.929" v="8" actId="26606"/>
         <pc:sldMkLst>
           <pc:docMk/>
           <pc:sldMk cId="0" sldId="258"/>
         </pc:sldMkLst>
         <pc:spChg chg="mod">
-          <ac:chgData name="Kyle Emler" userId="d7ad607c459f9042" providerId="LiveId" clId="{EB07A9B2-3D2E-4B01-87CD-3E1B255B7E55}" dt="2026-09-20T02:40:07.391" v="1" actId="26606"/>
+          <ac:chgData name="Kyle Emler" userId="d7ad607c459f9042" providerId="LiveId" clId="{EB07A9B2-3D2E-4B01-87CD-3E1B255B7E55}" dt="2026-09-27T05:33:22.929" v="8" actId="26606"/>
           <ac:spMkLst>
             <pc:docMk/>
             <pc:sldMk cId="0" sldId="258"/>
@@ -222,44 +189,53 @@
           </ac:spMkLst>
         </pc:spChg>
       </pc:sldChg>
-      <pc:sldChg chg="modSp del mod ord">
-        <pc:chgData name="Kyle Emler" userId="d7ad607c459f9042" providerId="LiveId" clId="{EB07A9B2-3D2E-4B01-87CD-3E1B255B7E55}" dt="2026-09-20T02:40:28.647" v="2" actId="47"/>
-        <pc:sldMkLst>
-          <pc:docMk/>
-          <pc:sldMk cId="0" sldId="259"/>
-        </pc:sldMkLst>
-        <pc:spChg chg="mod">
-          <ac:chgData name="Kyle Emler" userId="d7ad607c459f9042" providerId="LiveId" clId="{EB07A9B2-3D2E-4B01-87CD-3E1B255B7E55}" dt="2026-09-20T02:40:07.391" v="1" actId="26606"/>
-          <ac:spMkLst>
-            <pc:docMk/>
-            <pc:sldMk cId="0" sldId="259"/>
-            <ac:spMk id="11" creationId="{00000000-0000-0000-0000-000000000000}"/>
-          </ac:spMkLst>
-        </pc:spChg>
-      </pc:sldChg>
-      <pc:sldChg chg="modSp mod">
-        <pc:chgData name="Kyle Emler" userId="d7ad607c459f9042" providerId="LiveId" clId="{EB07A9B2-3D2E-4B01-87CD-3E1B255B7E55}" dt="2026-09-20T02:40:07.391" v="1" actId="26606"/>
+      <pc:sldChg chg="modSp del mod">
+        <pc:chgData name="Kyle Emler" userId="d7ad607c459f9042" providerId="LiveId" clId="{EB07A9B2-3D2E-4B01-87CD-3E1B255B7E55}" dt="2026-09-27T05:22:28.768" v="3" actId="47"/>
         <pc:sldMkLst>
           <pc:docMk/>
           <pc:sldMk cId="0" sldId="260"/>
         </pc:sldMkLst>
-        <pc:spChg chg="mod">
-          <ac:chgData name="Kyle Emler" userId="d7ad607c459f9042" providerId="LiveId" clId="{EB07A9B2-3D2E-4B01-87CD-3E1B255B7E55}" dt="2026-09-20T02:40:07.391" v="1" actId="26606"/>
-          <ac:spMkLst>
-            <pc:docMk/>
-            <pc:sldMk cId="0" sldId="260"/>
-            <ac:spMk id="11" creationId="{00000000-0000-0000-0000-000000000000}"/>
-          </ac:spMkLst>
-        </pc:spChg>
       </pc:sldChg>
       <pc:sldChg chg="modSp mod">
-        <pc:chgData name="Kyle Emler" userId="d7ad607c459f9042" providerId="LiveId" clId="{EB07A9B2-3D2E-4B01-87CD-3E1B255B7E55}" dt="2026-09-20T02:40:07.391" v="1" actId="26606"/>
+        <pc:chgData name="Kyle Emler" userId="d7ad607c459f9042" providerId="LiveId" clId="{EB07A9B2-3D2E-4B01-87CD-3E1B255B7E55}" dt="2026-09-27T05:33:22.929" v="8" actId="26606"/>
         <pc:sldMkLst>
           <pc:docMk/>
           <pc:sldMk cId="0" sldId="261"/>
         </pc:sldMkLst>
         <pc:spChg chg="mod">
-          <ac:chgData name="Kyle Emler" userId="d7ad607c459f9042" providerId="LiveId" clId="{EB07A9B2-3D2E-4B01-87CD-3E1B255B7E55}" dt="2026-09-20T02:40:07.391" v="1" actId="26606"/>
+          <ac:chgData name="Kyle Emler" userId="d7ad607c459f9042" providerId="LiveId" clId="{EB07A9B2-3D2E-4B01-87CD-3E1B255B7E55}" dt="2026-09-27T05:27:01.327" v="5" actId="26606"/>
+          <ac:spMkLst>
+            <pc:docMk/>
+            <pc:sldMk cId="0" sldId="261"/>
+            <ac:spMk id="6" creationId="{00000000-0000-0000-0000-000000000000}"/>
+          </ac:spMkLst>
+        </pc:spChg>
+        <pc:spChg chg="mod">
+          <ac:chgData name="Kyle Emler" userId="d7ad607c459f9042" providerId="LiveId" clId="{EB07A9B2-3D2E-4B01-87CD-3E1B255B7E55}" dt="2026-09-27T05:27:18.721" v="6" actId="26606"/>
+          <ac:spMkLst>
+            <pc:docMk/>
+            <pc:sldMk cId="0" sldId="261"/>
+            <ac:spMk id="7" creationId="{00000000-0000-0000-0000-000000000000}"/>
+          </ac:spMkLst>
+        </pc:spChg>
+        <pc:spChg chg="mod">
+          <ac:chgData name="Kyle Emler" userId="d7ad607c459f9042" providerId="LiveId" clId="{EB07A9B2-3D2E-4B01-87CD-3E1B255B7E55}" dt="2026-09-27T05:27:01.327" v="5" actId="26606"/>
+          <ac:spMkLst>
+            <pc:docMk/>
+            <pc:sldMk cId="0" sldId="261"/>
+            <ac:spMk id="11" creationId="{00000000-0000-0000-0000-000000000000}"/>
+          </ac:spMkLst>
+        </pc:spChg>
+        <pc:spChg chg="mod">
+          <ac:chgData name="Kyle Emler" userId="d7ad607c459f9042" providerId="LiveId" clId="{EB07A9B2-3D2E-4B01-87CD-3E1B255B7E55}" dt="2026-09-27T05:27:01.327" v="5" actId="26606"/>
+          <ac:spMkLst>
+            <pc:docMk/>
+            <pc:sldMk cId="0" sldId="261"/>
+            <ac:spMk id="12" creationId="{00000000-0000-0000-0000-000000000000}"/>
+          </ac:spMkLst>
+        </pc:spChg>
+        <pc:spChg chg="mod">
+          <ac:chgData name="Kyle Emler" userId="d7ad607c459f9042" providerId="LiveId" clId="{EB07A9B2-3D2E-4B01-87CD-3E1B255B7E55}" dt="2026-09-27T05:33:22.929" v="8" actId="26606"/>
           <ac:spMkLst>
             <pc:docMk/>
             <pc:sldMk cId="0" sldId="261"/>
@@ -267,20 +243,19 @@
           </ac:spMkLst>
         </pc:spChg>
       </pc:sldChg>
-      <pc:sldChg chg="modSp add mod">
-        <pc:chgData name="Kyle Emler" userId="d7ad607c459f9042" providerId="LiveId" clId="{EB07A9B2-3D2E-4B01-87CD-3E1B255B7E55}" dt="2026-09-20T02:40:07.391" v="1" actId="26606"/>
+      <pc:sldChg chg="modSp add del mod ord">
+        <pc:chgData name="Kyle Emler" userId="d7ad607c459f9042" providerId="LiveId" clId="{EB07A9B2-3D2E-4B01-87CD-3E1B255B7E55}" dt="2026-09-27T05:27:42.011" v="7" actId="26606"/>
         <pc:sldMkLst>
           <pc:docMk/>
           <pc:sldMk cId="0" sldId="264"/>
         </pc:sldMkLst>
-        <pc:spChg chg="mod">
-          <ac:chgData name="Kyle Emler" userId="d7ad607c459f9042" providerId="LiveId" clId="{EB07A9B2-3D2E-4B01-87CD-3E1B255B7E55}" dt="2026-09-20T02:40:07.391" v="1" actId="26606"/>
-          <ac:spMkLst>
-            <pc:docMk/>
-            <pc:sldMk cId="0" sldId="264"/>
-            <ac:spMk id="11" creationId="{00000000-0000-0000-0000-000000000000}"/>
-          </ac:spMkLst>
-        </pc:spChg>
+      </pc:sldChg>
+      <pc:sldChg chg="add del">
+        <pc:chgData name="Kyle Emler" userId="d7ad607c459f9042" providerId="LiveId" clId="{EB07A9B2-3D2E-4B01-87CD-3E1B255B7E55}" dt="2026-09-27T05:35:41.778" v="9" actId="47"/>
+        <pc:sldMkLst>
+          <pc:docMk/>
+          <pc:sldMk cId="0" sldId="265"/>
+        </pc:sldMkLst>
       </pc:sldChg>
     </pc:docChg>
   </pc:docChgLst>
@@ -369,7 +344,7 @@
           <a:p>
             <a:fld id="{5282F153-3F37-0F45-9E97-73ACFA13230C}" type="datetimeFigureOut">
               <a:rPr lang="en-US"/>
-              <a:t>9/19/2026</a:t>
+              <a:t>9/27/2026</a:t>
             </a:fld>
             <a:endParaRPr lang="en-US"/>
           </a:p>
@@ -869,7 +844,7 @@
           <a:p>
             <a:fld id="{F7021451-1387-4CA6-816F-3879F97B5CBC}" type="slidenum">
               <a:rPr lang="en-US"/>
-              <a:t>4</a:t>
+              <a:t>3</a:t>
             </a:fld>
             <a:endParaRPr lang="en-US"/>
           </a:p>
@@ -953,7 +928,7 @@
           <a:p>
             <a:fld id="{F7021451-1387-4CA6-816F-3879F97B5CBC}" type="slidenum">
               <a:rPr lang="en-US"/>
-              <a:t>5</a:t>
+              <a:t>4</a:t>
             </a:fld>
             <a:endParaRPr lang="en-US"/>
           </a:p>
@@ -1122,90 +1097,6 @@
             <a:fld id="{F7021451-1387-4CA6-816F-3879F97B5CBC}" type="slidenum">
               <a:rPr lang="en-US"/>
               <a:t>7</a:t>
-            </a:fld>
-            <a:endParaRPr lang="en-US"/>
-          </a:p>
-        </p:txBody>
-      </p:sp>
-    </p:spTree>
-    <p:extLst>
-      <p:ext uri="{BB962C8B-B14F-4D97-AF65-F5344CB8AC3E}">
-        <p14:creationId xmlns:p14="http://schemas.microsoft.com/office/powerpoint/2010/main" val="1024086991"/>
-      </p:ext>
-    </p:extLst>
-  </p:cSld>
-  <p:clrMapOvr>
-    <a:masterClrMapping/>
-  </p:clrMapOvr>
-</p:notes>
-</file>
-
-<file path=ppt/notesSlides/notesSlide7.xml><?xml version="1.0" encoding="utf-8"?>
-<p:notes xmlns:a="http://schemas.openxmlformats.org/drawingml/2006/main" xmlns:r="http://schemas.openxmlformats.org/officeDocument/2006/relationships" xmlns:p="http://schemas.openxmlformats.org/presentationml/2006/main">
-  <p:cSld>
-    <p:spTree>
-      <p:nvGrpSpPr>
-        <p:cNvPr id="1" name=""/>
-        <p:cNvGrpSpPr/>
-        <p:nvPr/>
-      </p:nvGrpSpPr>
-      <p:grpSpPr>
-        <a:xfrm>
-          <a:off x="0" y="0"/>
-          <a:ext cx="0" cy="0"/>
-          <a:chOff x="0" y="0"/>
-          <a:chExt cx="0" cy="0"/>
-        </a:xfrm>
-      </p:grpSpPr>
-      <p:sp>
-        <p:nvSpPr>
-          <p:cNvPr id="2" name="Slide Image Placeholder 1"/>
-          <p:cNvSpPr>
-            <a:spLocks noGrp="1" noRot="1" noChangeAspect="1"/>
-          </p:cNvSpPr>
-          <p:nvPr>
-            <p:ph type="sldImg"/>
-          </p:nvPr>
-        </p:nvSpPr>
-        <p:spPr/>
-      </p:sp>
-      <p:sp>
-        <p:nvSpPr>
-          <p:cNvPr id="3" name="Notes Placeholder 2"/>
-          <p:cNvSpPr>
-            <a:spLocks noGrp="1"/>
-          </p:cNvSpPr>
-          <p:nvPr>
-            <p:ph type="body" idx="1"/>
-          </p:nvPr>
-        </p:nvSpPr>
-        <p:spPr/>
-        <p:txBody>
-          <a:bodyPr/>
-          <a:lstStyle/>
-          <a:p>
-            <a:endParaRPr lang="en-US" dirty="0"/>
-          </a:p>
-        </p:txBody>
-      </p:sp>
-      <p:sp>
-        <p:nvSpPr>
-          <p:cNvPr id="4" name="Slide Number Placeholder 3"/>
-          <p:cNvSpPr>
-            <a:spLocks noGrp="1"/>
-          </p:cNvSpPr>
-          <p:nvPr>
-            <p:ph type="sldNum" sz="quarter" idx="10"/>
-          </p:nvPr>
-        </p:nvSpPr>
-        <p:spPr/>
-        <p:txBody>
-          <a:bodyPr/>
-          <a:lstStyle/>
-          <a:p>
-            <a:fld id="{F7021451-1387-4CA6-816F-3879F97B5CBC}" type="slidenum">
-              <a:rPr lang="en-US"/>
-              <a:t>8</a:t>
             </a:fld>
             <a:endParaRPr lang="en-US"/>
           </a:p>
@@ -1957,7 +1848,7 @@
 
 <file path=ppt/slides/slide2.xml><?xml version="1.0" encoding="utf-8"?>
 <p:sld xmlns:a="http://schemas.openxmlformats.org/drawingml/2006/main" xmlns:r="http://schemas.openxmlformats.org/officeDocument/2006/relationships" xmlns:p="http://schemas.openxmlformats.org/presentationml/2006/main">
-  <p:cSld name="Slide 5">
+  <p:cSld name="Slide 3">
     <p:spTree>
       <p:nvGrpSpPr>
         <p:cNvPr id="1" name=""/>
@@ -2167,7 +2058,7 @@
                 <a:ea typeface="Gill Sans MT" pitchFamily="34" charset="-122"/>
                 <a:cs typeface="Gill Sans MT" pitchFamily="34" charset="-120"/>
               </a:rPr>
-              <a:t>PRIMARY</a:t>
+              <a:t>RELIEF  SOCIETY</a:t>
             </a:r>
             <a:endParaRPr lang="en-US" sz="2600" dirty="0"/>
           </a:p>
@@ -2210,7 +2101,7 @@
                 <a:ea typeface="Georgia" pitchFamily="34" charset="-122"/>
                 <a:cs typeface="Georgia" pitchFamily="34" charset="-120"/>
               </a:rPr>
-              <a:t>Primary Program Practice</a:t>
+              <a:t>Relief Society Campout</a:t>
             </a:r>
             <a:endParaRPr lang="en-US" sz="5000" dirty="0"/>
           </a:p>
@@ -2373,7 +2264,7 @@
                 <a:ea typeface="Georgia" pitchFamily="34" charset="-122"/>
                 <a:cs typeface="Georgia" pitchFamily="34" charset="-120"/>
               </a:rPr>
-              <a:t>September 22 — 6:00 to 7:30 PM</a:t>
+              <a:t>October 9 – 10</a:t>
             </a:r>
             <a:endParaRPr lang="en-US" sz="4400" dirty="0"/>
           </a:p>
@@ -2412,7 +2303,7 @@
                 <a:ea typeface="Gill Sans MT" pitchFamily="34" charset="-122"/>
                 <a:cs typeface="Gill Sans MT" pitchFamily="34" charset="-120"/>
               </a:rPr>
-              <a:t>At the church</a:t>
+              <a:t>Camp Thunder Ridge</a:t>
             </a:r>
             <a:endParaRPr lang="en-US" sz="3600" dirty="0"/>
           </a:p>
@@ -2451,7 +2342,7 @@
                 <a:ea typeface="Gill Sans MT" pitchFamily="34" charset="-122"/>
                 <a:cs typeface="Gill Sans MT" pitchFamily="34" charset="-120"/>
               </a:rPr>
-              <a:t>Pizza provided</a:t>
+              <a:t>32701 E 660 Rd, Chouteau, OK 74337</a:t>
             </a:r>
             <a:endParaRPr lang="en-US" sz="3000" dirty="0"/>
           </a:p>
@@ -2547,7 +2438,7 @@
 
 <file path=ppt/slides/slide3.xml><?xml version="1.0" encoding="utf-8"?>
 <p:sld xmlns:a="http://schemas.openxmlformats.org/drawingml/2006/main" xmlns:r="http://schemas.openxmlformats.org/officeDocument/2006/relationships" xmlns:p="http://schemas.openxmlformats.org/presentationml/2006/main">
-  <p:cSld name="Slide 5">
+  <p:cSld name="Slide 6">
     <p:spTree>
       <p:nvGrpSpPr>
         <p:cNvPr id="1" name=""/>
@@ -2757,9 +2648,9 @@
                 <a:ea typeface="Gill Sans MT" pitchFamily="34" charset="-122"/>
                 <a:cs typeface="Gill Sans MT" pitchFamily="34" charset="-120"/>
               </a:rPr>
-              <a:t>STAKE  EVENT</a:t>
+              <a:t>YOUNG  SINGLE  ADULTS</a:t>
             </a:r>
-            <a:endParaRPr lang="en-US" sz="2600"/>
+            <a:endParaRPr lang="en-US" sz="2600" dirty="0"/>
           </a:p>
         </p:txBody>
       </p:sp>
@@ -2800,9 +2691,9 @@
                 <a:ea typeface="Georgia" pitchFamily="34" charset="-122"/>
                 <a:cs typeface="Georgia" pitchFamily="34" charset="-120"/>
               </a:rPr>
-              <a:t>Stake Mother &amp; Son Activity</a:t>
+              <a:t>Single Adult Fireside</a:t>
             </a:r>
-            <a:endParaRPr lang="en-US" sz="5000"/>
+            <a:endParaRPr lang="en-US" sz="5000" dirty="0"/>
           </a:p>
         </p:txBody>
       </p:sp>
@@ -2926,13 +2817,7 @@
       </p:sp>
       <p:sp>
         <p:nvSpPr>
-          <p:cNvPr id="11" name="Text 9">
-            <a:extLst>
-              <a:ext uri="{C183D7F6-B498-43B3-948B-1728B52AA6E4}">
-                <adec:decorative xmlns:adec="http://schemas.microsoft.com/office/drawing/2017/decorative" val="0"/>
-              </a:ext>
-            </a:extLst>
-          </p:cNvPr>
+          <p:cNvPr id="11" name="Text 9"/>
           <p:cNvSpPr/>
           <p:nvPr/>
         </p:nvSpPr>
@@ -2963,9 +2848,9 @@
                 <a:ea typeface="Georgia" pitchFamily="34" charset="-122"/>
                 <a:cs typeface="Georgia" pitchFamily="34" charset="-120"/>
               </a:rPr>
-              <a:t>September 26 — 5:00 to 7:00 PM</a:t>
+              <a:t>October 18 — 6:30 PM</a:t>
             </a:r>
-            <a:endParaRPr lang="en-US" sz="4400"/>
+            <a:endParaRPr lang="en-US" sz="4400" dirty="0"/>
           </a:p>
         </p:txBody>
       </p:sp>
@@ -3002,15 +2887,21 @@
                 <a:ea typeface="Gill Sans MT" pitchFamily="34" charset="-122"/>
                 <a:cs typeface="Gill Sans MT" pitchFamily="34" charset="-120"/>
               </a:rPr>
-              <a:t>Broken Arrow Building</a:t>
+              <a:t>Owasso Building</a:t>
             </a:r>
-            <a:endParaRPr lang="en-US" sz="3600"/>
-          </a:p>
-        </p:txBody>
-      </p:sp>
-      <p:sp>
-        <p:nvSpPr>
-          <p:cNvPr id="13" name="Text 11"/>
+            <a:endParaRPr lang="en-US" sz="3600" dirty="0"/>
+          </a:p>
+        </p:txBody>
+      </p:sp>
+      <p:sp>
+        <p:nvSpPr>
+          <p:cNvPr id="13" name="Text 11">
+            <a:extLst>
+              <a:ext uri="{C183D7F6-B498-43B3-948B-1728B52AA6E4}">
+                <adec:decorative xmlns:adec="http://schemas.microsoft.com/office/drawing/2017/decorative" val="0"/>
+              </a:ext>
+            </a:extLst>
+          </p:cNvPr>
           <p:cNvSpPr/>
           <p:nvPr/>
         </p:nvSpPr>
@@ -3041,597 +2932,7 @@
                 <a:ea typeface="Gill Sans MT" pitchFamily="34" charset="-122"/>
                 <a:cs typeface="Gill Sans MT" pitchFamily="34" charset="-120"/>
               </a:rPr>
-              <a:t>Food, games, and fun</a:t>
-            </a:r>
-            <a:endParaRPr lang="en-US" sz="3000"/>
-          </a:p>
-        </p:txBody>
-      </p:sp>
-      <p:sp>
-        <p:nvSpPr>
-          <p:cNvPr id="14" name="Footer rule">
-            <a:extLst>
-              <a:ext uri="{C183D7F6-B498-43B3-948B-1728B52AA6E4}">
-                <adec:decorative xmlns:adec="http://schemas.microsoft.com/office/drawing/2017/decorative" val="1"/>
-              </a:ext>
-            </a:extLst>
-          </p:cNvPr>
-          <p:cNvSpPr/>
-          <p:nvPr/>
-        </p:nvSpPr>
-        <p:spPr>
-          <a:xfrm>
-            <a:off x="914400" y="5897880"/>
-            <a:ext cx="1005840" cy="36576"/>
-          </a:xfrm>
-          <a:prstGeom prst="rect">
-            <a:avLst/>
-          </a:prstGeom>
-          <a:solidFill>
-            <a:srgbClr val="8FB3DE"/>
-          </a:solidFill>
-          <a:ln w="12700">
-            <a:solidFill>
-              <a:srgbClr val="333333"/>
-            </a:solidFill>
-            <a:prstDash val="solid"/>
-          </a:ln>
-        </p:spPr>
-        <p:txBody>
-          <a:bodyPr/>
-          <a:lstStyle/>
-          <a:p>
-            <a:endParaRPr lang="en-US"/>
-          </a:p>
-        </p:txBody>
-      </p:sp>
-      <p:sp>
-        <p:nvSpPr>
-          <p:cNvPr id="15" name="Text 13"/>
-          <p:cNvSpPr/>
-          <p:nvPr/>
-        </p:nvSpPr>
-        <p:spPr>
-          <a:xfrm>
-            <a:off x="914400" y="5989320"/>
-            <a:ext cx="10360152" cy="457200"/>
-          </a:xfrm>
-          <a:prstGeom prst="rect">
-            <a:avLst/>
-          </a:prstGeom>
-          <a:noFill/>
-          <a:ln/>
-        </p:spPr>
-        <p:txBody>
-          <a:bodyPr wrap="square" lIns="0" tIns="0" rIns="0" bIns="0" rtlCol="0" anchor="ctr"/>
-          <a:lstStyle/>
-          <a:p>
-            <a:pPr marL="0" indent="0">
-              <a:buNone/>
-            </a:pPr>
-            <a:r>
-              <a:rPr lang="en-US" sz="2400" kern="0" spc="200">
-                <a:solidFill>
-                  <a:srgbClr val="8FB3DE"/>
-                </a:solidFill>
-                <a:latin typeface="Gill Sans MT" pitchFamily="34" charset="0"/>
-                <a:ea typeface="Gill Sans MT" pitchFamily="34" charset="-122"/>
-                <a:cs typeface="Gill Sans MT" pitchFamily="34" charset="-120"/>
-              </a:rPr>
-              <a:t>FOREST RIDGE WARD</a:t>
-            </a:r>
-            <a:endParaRPr lang="en-US" sz="2400"/>
-          </a:p>
-        </p:txBody>
-      </p:sp>
-    </p:spTree>
-  </p:cSld>
-  <p:clrMapOvr>
-    <a:masterClrMapping/>
-  </p:clrMapOvr>
-  <p:transition spd="slow" advClick="0" advTm="12000">
-    <p:fade/>
-  </p:transition>
-</p:sld>
-</file>
-
-<file path=ppt/slides/slide4.xml><?xml version="1.0" encoding="utf-8"?>
-<p:sld xmlns:a="http://schemas.openxmlformats.org/drawingml/2006/main" xmlns:r="http://schemas.openxmlformats.org/officeDocument/2006/relationships" xmlns:p="http://schemas.openxmlformats.org/presentationml/2006/main">
-  <p:cSld name="Slide 3">
-    <p:spTree>
-      <p:nvGrpSpPr>
-        <p:cNvPr id="1" name=""/>
-        <p:cNvGrpSpPr/>
-        <p:nvPr/>
-      </p:nvGrpSpPr>
-      <p:grpSpPr>
-        <a:xfrm>
-          <a:off x="0" y="0"/>
-          <a:ext cx="0" cy="0"/>
-          <a:chOff x="0" y="0"/>
-          <a:chExt cx="0" cy="0"/>
-        </a:xfrm>
-      </p:grpSpPr>
-      <p:sp>
-        <p:nvSpPr>
-          <p:cNvPr id="2" name="Wash">
-            <a:extLst>
-              <a:ext uri="{C183D7F6-B498-43B3-948B-1728B52AA6E4}">
-                <adec:decorative xmlns:adec="http://schemas.microsoft.com/office/drawing/2017/decorative" val="1"/>
-              </a:ext>
-            </a:extLst>
-          </p:cNvPr>
-          <p:cNvSpPr/>
-          <p:nvPr/>
-        </p:nvSpPr>
-        <p:spPr>
-          <a:xfrm>
-            <a:off x="-2926080" y="-3291840"/>
-            <a:ext cx="8686800" cy="8686800"/>
-          </a:xfrm>
-          <a:prstGeom prst="ellipse">
-            <a:avLst/>
-          </a:prstGeom>
-          <a:solidFill>
-            <a:srgbClr val="13315C">
-              <a:alpha val="55000"/>
-            </a:srgbClr>
-          </a:solidFill>
-          <a:ln w="12700">
-            <a:solidFill>
-              <a:srgbClr val="13315C"/>
-            </a:solidFill>
-            <a:prstDash val="solid"/>
-          </a:ln>
-        </p:spPr>
-        <p:txBody>
-          <a:bodyPr/>
-          <a:lstStyle/>
-          <a:p>
-            <a:endParaRPr lang="en-US"/>
-          </a:p>
-        </p:txBody>
-      </p:sp>
-      <p:sp>
-        <p:nvSpPr>
-          <p:cNvPr id="3" name="Wash 2">
-            <a:extLst>
-              <a:ext uri="{C183D7F6-B498-43B3-948B-1728B52AA6E4}">
-                <adec:decorative xmlns:adec="http://schemas.microsoft.com/office/drawing/2017/decorative" val="1"/>
-              </a:ext>
-            </a:extLst>
-          </p:cNvPr>
-          <p:cNvSpPr/>
-          <p:nvPr/>
-        </p:nvSpPr>
-        <p:spPr>
-          <a:xfrm>
-            <a:off x="7315200" y="3108960"/>
-            <a:ext cx="7680960" cy="7680960"/>
-          </a:xfrm>
-          <a:prstGeom prst="ellipse">
-            <a:avLst/>
-          </a:prstGeom>
-          <a:solidFill>
-            <a:srgbClr val="2E5A94">
-              <a:alpha val="22000"/>
-            </a:srgbClr>
-          </a:solidFill>
-          <a:ln w="12700">
-            <a:solidFill>
-              <a:srgbClr val="2E5A94"/>
-            </a:solidFill>
-            <a:prstDash val="solid"/>
-          </a:ln>
-        </p:spPr>
-        <p:txBody>
-          <a:bodyPr/>
-          <a:lstStyle/>
-          <a:p>
-            <a:endParaRPr lang="en-US"/>
-          </a:p>
-        </p:txBody>
-      </p:sp>
-      <p:sp>
-        <p:nvSpPr>
-          <p:cNvPr id="4" name="Wash 3">
-            <a:extLst>
-              <a:ext uri="{C183D7F6-B498-43B3-948B-1728B52AA6E4}">
-                <adec:decorative xmlns:adec="http://schemas.microsoft.com/office/drawing/2017/decorative" val="1"/>
-              </a:ext>
-            </a:extLst>
-          </p:cNvPr>
-          <p:cNvSpPr/>
-          <p:nvPr/>
-        </p:nvSpPr>
-        <p:spPr>
-          <a:xfrm>
-            <a:off x="8778240" y="-2103120"/>
-            <a:ext cx="5120640" cy="5120640"/>
-          </a:xfrm>
-          <a:prstGeom prst="ellipse">
-            <a:avLst/>
-          </a:prstGeom>
-          <a:solidFill>
-            <a:srgbClr val="13315C">
-              <a:alpha val="45000"/>
-            </a:srgbClr>
-          </a:solidFill>
-          <a:ln w="12700">
-            <a:solidFill>
-              <a:srgbClr val="13315C"/>
-            </a:solidFill>
-            <a:prstDash val="solid"/>
-          </a:ln>
-        </p:spPr>
-        <p:txBody>
-          <a:bodyPr/>
-          <a:lstStyle/>
-          <a:p>
-            <a:endParaRPr lang="en-US"/>
-          </a:p>
-        </p:txBody>
-      </p:sp>
-      <p:sp>
-        <p:nvSpPr>
-          <p:cNvPr id="5" name="Hairline frame">
-            <a:extLst>
-              <a:ext uri="{C183D7F6-B498-43B3-948B-1728B52AA6E4}">
-                <adec:decorative xmlns:adec="http://schemas.microsoft.com/office/drawing/2017/decorative" val="1"/>
-              </a:ext>
-            </a:extLst>
-          </p:cNvPr>
-          <p:cNvSpPr/>
-          <p:nvPr/>
-        </p:nvSpPr>
-        <p:spPr>
-          <a:xfrm>
-            <a:off x="384048" y="384048"/>
-            <a:ext cx="11423599" cy="6089904"/>
-          </a:xfrm>
-          <a:prstGeom prst="rect">
-            <a:avLst/>
-          </a:prstGeom>
-          <a:solidFill>
-            <a:srgbClr val="0B2545">
-              <a:alpha val="0"/>
-            </a:srgbClr>
-          </a:solidFill>
-          <a:ln w="9525">
-            <a:solidFill>
-              <a:srgbClr val="8FB3DE">
-                <a:alpha val="38000"/>
-              </a:srgbClr>
-            </a:solidFill>
-            <a:prstDash val="solid"/>
-          </a:ln>
-        </p:spPr>
-        <p:txBody>
-          <a:bodyPr/>
-          <a:lstStyle/>
-          <a:p>
-            <a:endParaRPr lang="en-US"/>
-          </a:p>
-        </p:txBody>
-      </p:sp>
-      <p:sp>
-        <p:nvSpPr>
-          <p:cNvPr id="6" name="Text 4"/>
-          <p:cNvSpPr/>
-          <p:nvPr/>
-        </p:nvSpPr>
-        <p:spPr>
-          <a:xfrm>
-            <a:off x="914400" y="475488"/>
-            <a:ext cx="10360152" cy="457200"/>
-          </a:xfrm>
-          <a:prstGeom prst="rect">
-            <a:avLst/>
-          </a:prstGeom>
-          <a:noFill/>
-          <a:ln/>
-        </p:spPr>
-        <p:txBody>
-          <a:bodyPr wrap="square" lIns="0" tIns="0" rIns="0" bIns="0" rtlCol="0" anchor="ctr"/>
-          <a:lstStyle/>
-          <a:p>
-            <a:pPr marL="0" indent="0">
-              <a:buNone/>
-            </a:pPr>
-            <a:r>
-              <a:rPr lang="en-US" sz="2600" b="1" kern="0" spc="350" dirty="0">
-                <a:solidFill>
-                  <a:srgbClr val="8FB3DE"/>
-                </a:solidFill>
-                <a:latin typeface="Gill Sans MT" pitchFamily="34" charset="0"/>
-                <a:ea typeface="Gill Sans MT" pitchFamily="34" charset="-122"/>
-                <a:cs typeface="Gill Sans MT" pitchFamily="34" charset="-120"/>
-              </a:rPr>
-              <a:t>RELIEF  SOCIETY</a:t>
-            </a:r>
-            <a:endParaRPr lang="en-US" sz="2600" dirty="0"/>
-          </a:p>
-        </p:txBody>
-      </p:sp>
-      <p:sp>
-        <p:nvSpPr>
-          <p:cNvPr id="7" name="Text 0"/>
-          <p:cNvSpPr>
-            <a:spLocks noGrp="1"/>
-          </p:cNvSpPr>
-          <p:nvPr>
-            <p:ph type="title" idx="100" hasCustomPrompt="1"/>
-          </p:nvPr>
-        </p:nvSpPr>
-        <p:spPr>
-          <a:xfrm>
-            <a:off x="914400" y="960120"/>
-            <a:ext cx="10360152" cy="1143000"/>
-          </a:xfrm>
-          <a:prstGeom prst="rect">
-            <a:avLst/>
-          </a:prstGeom>
-          <a:noFill/>
-          <a:ln/>
-        </p:spPr>
-        <p:txBody>
-          <a:bodyPr wrap="square" lIns="0" tIns="0" rIns="0" bIns="0" rtlCol="0" anchor="ctr"/>
-          <a:lstStyle/>
-          <a:p>
-            <a:pPr marL="0" indent="0" algn="l">
-              <a:buNone/>
-            </a:pPr>
-            <a:r>
-              <a:rPr lang="en-US" sz="5000" b="1" dirty="0">
-                <a:solidFill>
-                  <a:srgbClr val="FFFFFF"/>
-                </a:solidFill>
-                <a:latin typeface="Georgia" pitchFamily="34" charset="0"/>
-                <a:ea typeface="Georgia" pitchFamily="34" charset="-122"/>
-                <a:cs typeface="Georgia" pitchFamily="34" charset="-120"/>
-              </a:rPr>
-              <a:t>Relief Society Campout</a:t>
-            </a:r>
-            <a:endParaRPr lang="en-US" sz="5000" dirty="0"/>
-          </a:p>
-        </p:txBody>
-      </p:sp>
-      <p:sp>
-        <p:nvSpPr>
-          <p:cNvPr id="8" name="Rule">
-            <a:extLst>
-              <a:ext uri="{C183D7F6-B498-43B3-948B-1728B52AA6E4}">
-                <adec:decorative xmlns:adec="http://schemas.microsoft.com/office/drawing/2017/decorative" val="1"/>
-              </a:ext>
-            </a:extLst>
-          </p:cNvPr>
-          <p:cNvSpPr/>
-          <p:nvPr/>
-        </p:nvSpPr>
-        <p:spPr>
-          <a:xfrm>
-            <a:off x="914400" y="2240280"/>
-            <a:ext cx="1097280" cy="41148"/>
-          </a:xfrm>
-          <a:prstGeom prst="rect">
-            <a:avLst/>
-          </a:prstGeom>
-          <a:solidFill>
-            <a:srgbClr val="8FB3DE"/>
-          </a:solidFill>
-          <a:ln w="12700">
-            <a:solidFill>
-              <a:srgbClr val="333333"/>
-            </a:solidFill>
-            <a:prstDash val="solid"/>
-          </a:ln>
-        </p:spPr>
-        <p:txBody>
-          <a:bodyPr/>
-          <a:lstStyle/>
-          <a:p>
-            <a:endParaRPr lang="en-US"/>
-          </a:p>
-        </p:txBody>
-      </p:sp>
-      <p:sp>
-        <p:nvSpPr>
-          <p:cNvPr id="9" name="Event card">
-            <a:extLst>
-              <a:ext uri="{C183D7F6-B498-43B3-948B-1728B52AA6E4}">
-                <adec:decorative xmlns:adec="http://schemas.microsoft.com/office/drawing/2017/decorative" val="1"/>
-              </a:ext>
-            </a:extLst>
-          </p:cNvPr>
-          <p:cNvSpPr/>
-          <p:nvPr/>
-        </p:nvSpPr>
-        <p:spPr>
-          <a:xfrm>
-            <a:off x="914400" y="2697480"/>
-            <a:ext cx="10360152" cy="2697480"/>
-          </a:xfrm>
-          <a:prstGeom prst="rect">
-            <a:avLst/>
-          </a:prstGeom>
-          <a:solidFill>
-            <a:srgbClr val="13315C">
-              <a:alpha val="75000"/>
-            </a:srgbClr>
-          </a:solidFill>
-          <a:ln w="9525">
-            <a:solidFill>
-              <a:srgbClr val="8FB3DE">
-                <a:alpha val="45000"/>
-              </a:srgbClr>
-            </a:solidFill>
-            <a:prstDash val="solid"/>
-          </a:ln>
-        </p:spPr>
-        <p:txBody>
-          <a:bodyPr/>
-          <a:lstStyle/>
-          <a:p>
-            <a:endParaRPr lang="en-US"/>
-          </a:p>
-        </p:txBody>
-      </p:sp>
-      <p:sp>
-        <p:nvSpPr>
-          <p:cNvPr id="10" name="Card accent">
-            <a:extLst>
-              <a:ext uri="{C183D7F6-B498-43B3-948B-1728B52AA6E4}">
-                <adec:decorative xmlns:adec="http://schemas.microsoft.com/office/drawing/2017/decorative" val="1"/>
-              </a:ext>
-            </a:extLst>
-          </p:cNvPr>
-          <p:cNvSpPr/>
-          <p:nvPr/>
-        </p:nvSpPr>
-        <p:spPr>
-          <a:xfrm>
-            <a:off x="914400" y="2697480"/>
-            <a:ext cx="82296" cy="2697480"/>
-          </a:xfrm>
-          <a:prstGeom prst="rect">
-            <a:avLst/>
-          </a:prstGeom>
-          <a:solidFill>
-            <a:srgbClr val="8FB3DE"/>
-          </a:solidFill>
-          <a:ln w="12700">
-            <a:solidFill>
-              <a:srgbClr val="333333"/>
-            </a:solidFill>
-            <a:prstDash val="solid"/>
-          </a:ln>
-        </p:spPr>
-        <p:txBody>
-          <a:bodyPr/>
-          <a:lstStyle/>
-          <a:p>
-            <a:endParaRPr lang="en-US"/>
-          </a:p>
-        </p:txBody>
-      </p:sp>
-      <p:sp>
-        <p:nvSpPr>
-          <p:cNvPr id="11" name="Text 9">
-            <a:extLst>
-              <a:ext uri="{C183D7F6-B498-43B3-948B-1728B52AA6E4}">
-                <adec:decorative xmlns:adec="http://schemas.microsoft.com/office/drawing/2017/decorative" val="0"/>
-              </a:ext>
-            </a:extLst>
-          </p:cNvPr>
-          <p:cNvSpPr/>
-          <p:nvPr/>
-        </p:nvSpPr>
-        <p:spPr>
-          <a:xfrm>
-            <a:off x="1371600" y="2971800"/>
-            <a:ext cx="9509760" cy="777240"/>
-          </a:xfrm>
-          <a:prstGeom prst="rect">
-            <a:avLst/>
-          </a:prstGeom>
-          <a:noFill/>
-          <a:ln/>
-        </p:spPr>
-        <p:txBody>
-          <a:bodyPr wrap="square" lIns="0" tIns="0" rIns="0" bIns="0" rtlCol="0" anchor="ctr"/>
-          <a:lstStyle/>
-          <a:p>
-            <a:pPr marL="0" indent="0">
-              <a:buNone/>
-            </a:pPr>
-            <a:r>
-              <a:rPr lang="en-US" sz="4400" b="1" dirty="0">
-                <a:solidFill>
-                  <a:srgbClr val="FFFFFF"/>
-                </a:solidFill>
-                <a:latin typeface="Georgia" pitchFamily="34" charset="0"/>
-                <a:ea typeface="Georgia" pitchFamily="34" charset="-122"/>
-                <a:cs typeface="Georgia" pitchFamily="34" charset="-120"/>
-              </a:rPr>
-              <a:t>October 9 – 10</a:t>
-            </a:r>
-            <a:endParaRPr lang="en-US" sz="4400" dirty="0"/>
-          </a:p>
-        </p:txBody>
-      </p:sp>
-      <p:sp>
-        <p:nvSpPr>
-          <p:cNvPr id="12" name="Text 10"/>
-          <p:cNvSpPr/>
-          <p:nvPr/>
-        </p:nvSpPr>
-        <p:spPr>
-          <a:xfrm>
-            <a:off x="1371600" y="3840480"/>
-            <a:ext cx="9509760" cy="640080"/>
-          </a:xfrm>
-          <a:prstGeom prst="rect">
-            <a:avLst/>
-          </a:prstGeom>
-          <a:noFill/>
-          <a:ln/>
-        </p:spPr>
-        <p:txBody>
-          <a:bodyPr wrap="square" lIns="0" tIns="0" rIns="0" bIns="0" rtlCol="0" anchor="ctr"/>
-          <a:lstStyle/>
-          <a:p>
-            <a:pPr marL="0" indent="0">
-              <a:buNone/>
-            </a:pPr>
-            <a:r>
-              <a:rPr lang="en-US" sz="3600" dirty="0">
-                <a:solidFill>
-                  <a:srgbClr val="FFFFFF"/>
-                </a:solidFill>
-                <a:latin typeface="Gill Sans MT" pitchFamily="34" charset="0"/>
-                <a:ea typeface="Gill Sans MT" pitchFamily="34" charset="-122"/>
-                <a:cs typeface="Gill Sans MT" pitchFamily="34" charset="-120"/>
-              </a:rPr>
-              <a:t>Camp Thunder Ridge</a:t>
-            </a:r>
-            <a:endParaRPr lang="en-US" sz="3600" dirty="0"/>
-          </a:p>
-        </p:txBody>
-      </p:sp>
-      <p:sp>
-        <p:nvSpPr>
-          <p:cNvPr id="13" name="Text 11"/>
-          <p:cNvSpPr/>
-          <p:nvPr/>
-        </p:nvSpPr>
-        <p:spPr>
-          <a:xfrm>
-            <a:off x="1371600" y="4572000"/>
-            <a:ext cx="9509760" cy="594360"/>
-          </a:xfrm>
-          <a:prstGeom prst="rect">
-            <a:avLst/>
-          </a:prstGeom>
-          <a:noFill/>
-          <a:ln/>
-        </p:spPr>
-        <p:txBody>
-          <a:bodyPr wrap="square" lIns="0" tIns="0" rIns="0" bIns="0" rtlCol="0" anchor="ctr"/>
-          <a:lstStyle/>
-          <a:p>
-            <a:pPr marL="0" indent="0">
-              <a:buNone/>
-            </a:pPr>
-            <a:r>
-              <a:rPr lang="en-US" sz="3000" dirty="0">
-                <a:solidFill>
-                  <a:srgbClr val="8FB3DE"/>
-                </a:solidFill>
-                <a:latin typeface="Gill Sans MT" pitchFamily="34" charset="0"/>
-                <a:ea typeface="Gill Sans MT" pitchFamily="34" charset="-122"/>
-                <a:cs typeface="Gill Sans MT" pitchFamily="34" charset="-120"/>
-              </a:rPr>
-              <a:t>32701 E 660 Rd, Chouteau, OK 74337</a:t>
+              <a:t>Tacos provided; bring sides and desserts</a:t>
             </a:r>
             <a:endParaRPr lang="en-US" sz="3000" dirty="0"/>
           </a:p>
@@ -3725,7 +3026,7 @@
 </p:sld>
 </file>
 
-<file path=ppt/slides/slide5.xml><?xml version="1.0" encoding="utf-8"?>
+<file path=ppt/slides/slide4.xml><?xml version="1.0" encoding="utf-8"?>
 <p:sld xmlns:a="http://schemas.openxmlformats.org/drawingml/2006/main" xmlns:r="http://schemas.openxmlformats.org/officeDocument/2006/relationships" xmlns:p="http://schemas.openxmlformats.org/presentationml/2006/main">
   <p:cSld name="Slide 2">
     <p:spTree>
@@ -4395,7 +3696,7 @@
 </p:sld>
 </file>
 
-<file path=ppt/slides/slide6.xml><?xml version="1.0" encoding="utf-8"?>
+<file path=ppt/slides/slide5.xml><?xml version="1.0" encoding="utf-8"?>
 <p:sld xmlns:a="http://schemas.openxmlformats.org/drawingml/2006/main" xmlns:r="http://schemas.openxmlformats.org/officeDocument/2006/relationships" xmlns:p="http://schemas.openxmlformats.org/presentationml/2006/main">
   <p:cSld name="Slide 6">
     <p:spTree>
@@ -4599,7 +3900,7 @@
               <a:buNone/>
             </a:pPr>
             <a:r>
-              <a:rPr lang="en-US" sz="2600" b="1" kern="0" spc="350" dirty="0">
+              <a:rPr lang="en-US" sz="2600" b="1" kern="0" spc="350">
                 <a:solidFill>
                   <a:srgbClr val="8FB3DE"/>
                 </a:solidFill>
@@ -4609,7 +3910,7 @@
               </a:rPr>
               <a:t>SERVICE</a:t>
             </a:r>
-            <a:endParaRPr lang="en-US" sz="2600" dirty="0"/>
+            <a:endParaRPr lang="en-US" sz="2600"/>
           </a:p>
         </p:txBody>
       </p:sp>
@@ -4642,7 +3943,7 @@
               <a:buNone/>
             </a:pPr>
             <a:r>
-              <a:rPr lang="en-US" sz="5000" b="1" dirty="0">
+              <a:rPr lang="en-US" sz="5000" b="1">
                 <a:solidFill>
                   <a:srgbClr val="FFFFFF"/>
                 </a:solidFill>
@@ -4652,7 +3953,7 @@
               </a:rPr>
               <a:t>Feed Our Missionaries</a:t>
             </a:r>
-            <a:endParaRPr lang="en-US" sz="5000" dirty="0"/>
+            <a:endParaRPr lang="en-US" sz="5000"/>
           </a:p>
         </p:txBody>
       </p:sp>
@@ -4799,7 +4100,7 @@
               <a:buNone/>
             </a:pPr>
             <a:r>
-              <a:rPr lang="en-US" sz="4400" b="1" dirty="0">
+              <a:rPr lang="en-US" sz="4400" b="1">
                 <a:solidFill>
                   <a:srgbClr val="FFFFFF"/>
                 </a:solidFill>
@@ -4809,7 +4110,7 @@
               </a:rPr>
               <a:t>Sister Hulsey</a:t>
             </a:r>
-            <a:endParaRPr lang="en-US" sz="4400" dirty="0"/>
+            <a:endParaRPr lang="en-US" sz="4400"/>
           </a:p>
         </p:txBody>
       </p:sp>
@@ -4838,7 +4139,7 @@
               <a:buNone/>
             </a:pPr>
             <a:r>
-              <a:rPr lang="en-US" sz="3600" dirty="0">
+              <a:rPr lang="en-US" sz="3600">
                 <a:solidFill>
                   <a:srgbClr val="FFFFFF"/>
                 </a:solidFill>
@@ -4848,19 +4149,13 @@
               </a:rPr>
               <a:t>918-706-3296</a:t>
             </a:r>
-            <a:endParaRPr lang="en-US" sz="3600" dirty="0"/>
-          </a:p>
-        </p:txBody>
-      </p:sp>
-      <p:sp>
-        <p:nvSpPr>
-          <p:cNvPr id="13" name="Text 11">
-            <a:extLst>
-              <a:ext uri="{C183D7F6-B498-43B3-948B-1728B52AA6E4}">
-                <adec:decorative xmlns:adec="http://schemas.microsoft.com/office/drawing/2017/decorative" val="0"/>
-              </a:ext>
-            </a:extLst>
-          </p:cNvPr>
+            <a:endParaRPr lang="en-US" sz="3600"/>
+          </a:p>
+        </p:txBody>
+      </p:sp>
+      <p:sp>
+        <p:nvSpPr>
+          <p:cNvPr id="13" name="Text 11"/>
           <p:cNvSpPr/>
           <p:nvPr/>
         </p:nvSpPr>
@@ -4883,7 +4178,7 @@
               <a:buNone/>
             </a:pPr>
             <a:r>
-              <a:rPr lang="en-US" sz="3000" dirty="0">
+              <a:rPr lang="en-US" sz="3000">
                 <a:solidFill>
                   <a:srgbClr val="8FB3DE"/>
                 </a:solidFill>
@@ -4893,7 +4188,7 @@
               </a:rPr>
               <a:t>Call or text to sign up</a:t>
             </a:r>
-            <a:endParaRPr lang="en-US" sz="3000" dirty="0"/>
+            <a:endParaRPr lang="en-US" sz="3000"/>
           </a:p>
         </p:txBody>
       </p:sp>
@@ -4960,7 +4255,7 @@
               <a:buNone/>
             </a:pPr>
             <a:r>
-              <a:rPr lang="en-US" sz="2400" kern="0" spc="200" dirty="0">
+              <a:rPr lang="en-US" sz="2400" kern="0" spc="200">
                 <a:solidFill>
                   <a:srgbClr val="8FB3DE"/>
                 </a:solidFill>
@@ -4970,7 +4265,7 @@
               </a:rPr>
               <a:t>FOREST RIDGE WARD</a:t>
             </a:r>
-            <a:endParaRPr lang="en-US" sz="2400" dirty="0"/>
+            <a:endParaRPr lang="en-US" sz="2400"/>
           </a:p>
         </p:txBody>
       </p:sp>
@@ -4985,7 +4280,7 @@
 </p:sld>
 </file>
 
-<file path=ppt/slides/slide7.xml><?xml version="1.0" encoding="utf-8"?>
+<file path=ppt/slides/slide6.xml><?xml version="1.0" encoding="utf-8"?>
 <p:sld xmlns:a="http://schemas.openxmlformats.org/drawingml/2006/main" xmlns:r="http://schemas.openxmlformats.org/officeDocument/2006/relationships" xmlns:p="http://schemas.openxmlformats.org/presentationml/2006/main">
   <p:cSld name="Slide 7">
     <p:spTree>
@@ -5569,7 +4864,7 @@
 </p:sld>
 </file>
 
-<file path=ppt/slides/slide8.xml><?xml version="1.0" encoding="utf-8"?>
+<file path=ppt/slides/slide7.xml><?xml version="1.0" encoding="utf-8"?>
 <p:sld xmlns:a="http://schemas.openxmlformats.org/drawingml/2006/main" xmlns:r="http://schemas.openxmlformats.org/officeDocument/2006/relationships" xmlns:p="http://schemas.openxmlformats.org/presentationml/2006/main">
   <p:cSld name="Slide 8">
     <p:spTree>
